--- a/assets/pptx/catalog-557.pptx
+++ b/assets/pptx/catalog-557.pptx
@@ -3302,7 +3302,7 @@
                 <a:ea typeface="Ebrima"/>
                 <a:cs typeface="Ebrima"/>
               </a:rPr>
-              <a:t>አምላክ ሆይ አንተ ናና በመገኘትህ አርካት (5x)</a:t>
+              <a:t>አምላክ ሆይ አንተ ናና በመገኘትህ አርካት 5x</a:t>
             </a:r>
           </a:p>
         </p:txBody>
@@ -3459,7 +3459,7 @@
                 <a:ea typeface="Ebrima"/>
                 <a:cs typeface="Ebrima"/>
               </a:rPr>
-              <a:t>አንተው ነህ የምትበልጠው (2x)</a:t>
+              <a:t>አንተው ነህ የምትበልጠው 2x</a:t>
             </a:r>
           </a:p>
         </p:txBody>
@@ -3616,7 +3616,7 @@
                 <a:ea typeface="Ebrima"/>
                 <a:cs typeface="Ebrima"/>
               </a:rPr>
-              <a:t>ስፍራውን አሳየኝ የት ታሰማራለህ (2x)</a:t>
+              <a:t>ስፍራውን አሳየኝ የት ታሰማራለህ 2x</a:t>
             </a:r>
           </a:p>
         </p:txBody>
@@ -3737,7 +3737,7 @@
                 <a:ea typeface="Ebrima"/>
                 <a:cs typeface="Ebrima"/>
               </a:rPr>
-              <a:t>ርሃቤ ጥማቴ ጽድቁ ነው ጽድቁ ነው (2x)</a:t>
+              <a:t>ርሃቤ ጥማቴ ጽድቁ ነው ጽድቁ ነው 2x</a:t>
             </a:r>
           </a:p>
         </p:txBody>
@@ -4015,7 +4015,7 @@
                 <a:ea typeface="Ebrima"/>
                 <a:cs typeface="Ebrima"/>
               </a:rPr>
-              <a:t>ለሰዎች የሚበጅ (2x)</a:t>
+              <a:t>ለሰዎች የሚበጅ 2x</a:t>
             </a:r>
           </a:p>
           <a:p>
@@ -4069,7 +4069,7 @@
                 <a:ea typeface="Ebrima"/>
                 <a:cs typeface="Ebrima"/>
               </a:rPr>
-              <a:t>ስፍራውን አሳየኝ የት ታሰማራለህ (2x)</a:t>
+              <a:t>ስፍራውን አሳየኝ የት ታሰማራለህ 2x</a:t>
             </a:r>
           </a:p>
         </p:txBody>
@@ -4190,7 +4190,7 @@
                 <a:ea typeface="Ebrima"/>
                 <a:cs typeface="Ebrima"/>
               </a:rPr>
-              <a:t>ልቤስ በዚያ አይደል ወይ (3x)</a:t>
+              <a:t>ልቤስ በዚያ አይደል ወይ 3x</a:t>
             </a:r>
           </a:p>
         </p:txBody>
@@ -4275,7 +4275,7 @@
                 <a:ea typeface="Ebrima"/>
                 <a:cs typeface="Ebrima"/>
               </a:rPr>
-              <a:t>ስፍራውን አሳየኝ የት ታሰማራለህ (2x)</a:t>
+              <a:t>ስፍራውን አሳየኝ የት ታሰማራለህ 2x</a:t>
             </a:r>
           </a:p>
           <a:p>
